--- a/KICKR_Product_Development_RACI.pptx
+++ b/KICKR_Product_Development_RACI.pptx
@@ -3124,7 +3124,9 @@
             <a:srgbClr val="E8202F"/>
           </a:solidFill>
           <a:ln>
-            <a:noFill/>
+            <a:solidFill>
+              <a:srgbClr val="E8202F"/>
+            </a:solidFill>
           </a:ln>
         </p:spPr>
         <p:style>
@@ -3157,8 +3159,8 @@
         </p:nvSpPr>
         <p:spPr>
           <a:xfrm>
-            <a:off x="548640" y="1463040"/>
-            <a:ext cx="11091672" cy="1005840"/>
+            <a:off x="548640" y="1371600"/>
+            <a:ext cx="11091672" cy="1097280"/>
           </a:xfrm>
           <a:prstGeom prst="rect">
             <a:avLst/>
@@ -3173,7 +3175,7 @@
           <a:p>
             <a:pPr algn="ctr"/>
             <a:r>
-              <a:rPr sz="3800" b="1" i="0">
+              <a:rPr sz="3600" b="1" i="0">
                 <a:solidFill>
                   <a:srgbClr val="FFFFFF"/>
                 </a:solidFill>
@@ -3191,7 +3193,7 @@
         </p:nvSpPr>
         <p:spPr>
           <a:xfrm>
-            <a:off x="548640" y="2606040"/>
+            <a:off x="548640" y="2560320"/>
             <a:ext cx="11091672" cy="502920"/>
           </a:xfrm>
           <a:prstGeom prst="rect">
@@ -3207,12 +3209,12 @@
           <a:p>
             <a:pPr algn="ctr"/>
             <a:r>
-              <a:rPr sz="1600" b="0" i="0">
+              <a:rPr sz="1500" b="0" i="0">
                 <a:solidFill>
                   <a:srgbClr val="AAAAAA"/>
                 </a:solidFill>
               </a:rPr>
-              <a:t>RACI Responsibility Matrix  ·  Discovery through MP Launch</a:t>
+              <a:t>RACI Responsibility Matrix  |  Discovery through MP Launch</a:t>
             </a:r>
           </a:p>
         </p:txBody>
@@ -3235,7 +3237,9 @@
             <a:srgbClr val="BF1F1F"/>
           </a:solidFill>
           <a:ln>
-            <a:noFill/>
+            <a:solidFill>
+              <a:srgbClr val="BF1F1F"/>
+            </a:solidFill>
           </a:ln>
         </p:spPr>
         <p:style>
@@ -3312,7 +3316,9 @@
             <a:srgbClr val="E07C00"/>
           </a:solidFill>
           <a:ln>
-            <a:noFill/>
+            <a:solidFill>
+              <a:srgbClr val="E07C00"/>
+            </a:solidFill>
           </a:ln>
         </p:spPr>
         <p:style>
@@ -3389,7 +3395,9 @@
             <a:srgbClr val="1A65AD"/>
           </a:solidFill>
           <a:ln>
-            <a:noFill/>
+            <a:solidFill>
+              <a:srgbClr val="1A65AD"/>
+            </a:solidFill>
           </a:ln>
         </p:spPr>
         <p:style>
@@ -3466,7 +3474,9 @@
             <a:srgbClr val="888888"/>
           </a:solidFill>
           <a:ln>
-            <a:noFill/>
+            <a:solidFill>
+              <a:srgbClr val="888888"/>
+            </a:solidFill>
           </a:ln>
         </p:spPr>
         <p:style>
@@ -3543,7 +3553,9 @@
             <a:srgbClr val="7A187A"/>
           </a:solidFill>
           <a:ln>
-            <a:noFill/>
+            <a:solidFill>
+              <a:srgbClr val="7A187A"/>
+            </a:solidFill>
           </a:ln>
         </p:spPr>
         <p:style>
@@ -3646,7 +3658,9 @@
             <a:srgbClr val="8B001A"/>
           </a:solidFill>
           <a:ln>
-            <a:noFill/>
+            <a:solidFill>
+              <a:srgbClr val="8B001A"/>
+            </a:solidFill>
           </a:ln>
         </p:spPr>
         <p:style>
@@ -3757,7 +3771,9 @@
             <a:srgbClr val="BF1F1F"/>
           </a:solidFill>
           <a:ln>
-            <a:noFill/>
+            <a:solidFill>
+              <a:srgbClr val="BF1F1F"/>
+            </a:solidFill>
           </a:ln>
         </p:spPr>
         <p:style>
@@ -3834,7 +3850,9 @@
             <a:srgbClr val="E07C00"/>
           </a:solidFill>
           <a:ln>
-            <a:noFill/>
+            <a:solidFill>
+              <a:srgbClr val="E07C00"/>
+            </a:solidFill>
           </a:ln>
         </p:spPr>
         <p:style>
@@ -3911,7 +3929,9 @@
             <a:srgbClr val="1A65AD"/>
           </a:solidFill>
           <a:ln>
-            <a:noFill/>
+            <a:solidFill>
+              <a:srgbClr val="1A65AD"/>
+            </a:solidFill>
           </a:ln>
         </p:spPr>
         <p:style>
@@ -3988,7 +4008,9 @@
             <a:srgbClr val="888888"/>
           </a:solidFill>
           <a:ln>
-            <a:noFill/>
+            <a:solidFill>
+              <a:srgbClr val="888888"/>
+            </a:solidFill>
           </a:ln>
         </p:spPr>
         <p:style>
@@ -4065,7 +4087,9 @@
             <a:srgbClr val="7A187A"/>
           </a:solidFill>
           <a:ln>
-            <a:noFill/>
+            <a:solidFill>
+              <a:srgbClr val="7A187A"/>
+            </a:solidFill>
           </a:ln>
         </p:spPr>
         <p:style>
@@ -6399,7 +6423,9 @@
             <a:srgbClr val="4A004A"/>
           </a:solidFill>
           <a:ln>
-            <a:noFill/>
+            <a:solidFill>
+              <a:srgbClr val="4A004A"/>
+            </a:solidFill>
           </a:ln>
         </p:spPr>
         <p:style>
@@ -6510,7 +6536,9 @@
             <a:srgbClr val="BF1F1F"/>
           </a:solidFill>
           <a:ln>
-            <a:noFill/>
+            <a:solidFill>
+              <a:srgbClr val="BF1F1F"/>
+            </a:solidFill>
           </a:ln>
         </p:spPr>
         <p:style>
@@ -6587,7 +6615,9 @@
             <a:srgbClr val="E07C00"/>
           </a:solidFill>
           <a:ln>
-            <a:noFill/>
+            <a:solidFill>
+              <a:srgbClr val="E07C00"/>
+            </a:solidFill>
           </a:ln>
         </p:spPr>
         <p:style>
@@ -6664,7 +6694,9 @@
             <a:srgbClr val="1A65AD"/>
           </a:solidFill>
           <a:ln>
-            <a:noFill/>
+            <a:solidFill>
+              <a:srgbClr val="1A65AD"/>
+            </a:solidFill>
           </a:ln>
         </p:spPr>
         <p:style>
@@ -6741,7 +6773,9 @@
             <a:srgbClr val="888888"/>
           </a:solidFill>
           <a:ln>
-            <a:noFill/>
+            <a:solidFill>
+              <a:srgbClr val="888888"/>
+            </a:solidFill>
           </a:ln>
         </p:spPr>
         <p:style>
@@ -6818,7 +6852,9 @@
             <a:srgbClr val="7A187A"/>
           </a:solidFill>
           <a:ln>
-            <a:noFill/>
+            <a:solidFill>
+              <a:srgbClr val="7A187A"/>
+            </a:solidFill>
           </a:ln>
         </p:spPr>
         <p:style>
@@ -7478,7 +7514,9 @@
             <a:srgbClr val="1B457A"/>
           </a:solidFill>
           <a:ln>
-            <a:noFill/>
+            <a:solidFill>
+              <a:srgbClr val="1B457A"/>
+            </a:solidFill>
           </a:ln>
         </p:spPr>
         <p:style>
@@ -7574,41 +7612,7 @@
       </p:sp>
       <p:sp>
         <p:nvSpPr>
-          <p:cNvPr id="6" name="TextBox 5"/>
-          <p:cNvSpPr txBox="1"/>
-          <p:nvPr/>
-        </p:nvSpPr>
-        <p:spPr>
-          <a:xfrm>
-            <a:off x="1317752" y="1005840"/>
-            <a:ext cx="109728" cy="457200"/>
-          </a:xfrm>
-          <a:prstGeom prst="rect">
-            <a:avLst/>
-          </a:prstGeom>
-          <a:noFill/>
-        </p:spPr>
-        <p:txBody>
-          <a:bodyPr wrap="square">
-            <a:spAutoFit/>
-          </a:bodyPr>
-          <a:lstStyle/>
-          <a:p>
-            <a:pPr algn="ctr"/>
-            <a:r>
-              <a:rPr sz="1400" b="1" i="0">
-                <a:solidFill>
-                  <a:srgbClr val="AAAAAA"/>
-                </a:solidFill>
-              </a:rPr>
-              <a:t>›</a:t>
-            </a:r>
-          </a:p>
-        </p:txBody>
-      </p:sp>
-      <p:sp>
-        <p:nvSpPr>
-          <p:cNvPr id="7" name="Rectangle 6"/>
+          <p:cNvPr id="6" name="Rectangle 5"/>
           <p:cNvSpPr/>
           <p:nvPr/>
         </p:nvSpPr>
@@ -7624,7 +7628,9 @@
             <a:srgbClr val="0D628A"/>
           </a:solidFill>
           <a:ln>
-            <a:noFill/>
+            <a:solidFill>
+              <a:srgbClr val="0D628A"/>
+            </a:solidFill>
           </a:ln>
         </p:spPr>
         <p:style>
@@ -7651,7 +7657,7 @@
       </p:sp>
       <p:sp>
         <p:nvSpPr>
-          <p:cNvPr id="8" name="TextBox 7"/>
+          <p:cNvPr id="7" name="TextBox 6"/>
           <p:cNvSpPr txBox="1"/>
           <p:nvPr/>
         </p:nvSpPr>
@@ -7685,7 +7691,7 @@
       </p:sp>
       <p:sp>
         <p:nvSpPr>
-          <p:cNvPr id="9" name="TextBox 8"/>
+          <p:cNvPr id="8" name="TextBox 7"/>
           <p:cNvSpPr txBox="1"/>
           <p:nvPr/>
         </p:nvSpPr>
@@ -7720,41 +7726,7 @@
       </p:sp>
       <p:sp>
         <p:nvSpPr>
-          <p:cNvPr id="10" name="TextBox 9"/>
-          <p:cNvSpPr txBox="1"/>
-          <p:nvPr/>
-        </p:nvSpPr>
-        <p:spPr>
-          <a:xfrm>
-            <a:off x="2672080" y="1005840"/>
-            <a:ext cx="109728" cy="457200"/>
-          </a:xfrm>
-          <a:prstGeom prst="rect">
-            <a:avLst/>
-          </a:prstGeom>
-          <a:noFill/>
-        </p:spPr>
-        <p:txBody>
-          <a:bodyPr wrap="square">
-            <a:spAutoFit/>
-          </a:bodyPr>
-          <a:lstStyle/>
-          <a:p>
-            <a:pPr algn="ctr"/>
-            <a:r>
-              <a:rPr sz="1400" b="1" i="0">
-                <a:solidFill>
-                  <a:srgbClr val="AAAAAA"/>
-                </a:solidFill>
-              </a:rPr>
-              <a:t>›</a:t>
-            </a:r>
-          </a:p>
-        </p:txBody>
-      </p:sp>
-      <p:sp>
-        <p:nvSpPr>
-          <p:cNvPr id="11" name="Rectangle 10"/>
+          <p:cNvPr id="9" name="Rectangle 8"/>
           <p:cNvSpPr/>
           <p:nvPr/>
         </p:nvSpPr>
@@ -7770,7 +7742,9 @@
             <a:srgbClr val="0A7465"/>
           </a:solidFill>
           <a:ln>
-            <a:noFill/>
+            <a:solidFill>
+              <a:srgbClr val="0A7465"/>
+            </a:solidFill>
           </a:ln>
         </p:spPr>
         <p:style>
@@ -7797,7 +7771,7 @@
       </p:sp>
       <p:sp>
         <p:nvSpPr>
-          <p:cNvPr id="12" name="TextBox 11"/>
+          <p:cNvPr id="10" name="TextBox 9"/>
           <p:cNvSpPr txBox="1"/>
           <p:nvPr/>
         </p:nvSpPr>
@@ -7831,7 +7805,7 @@
       </p:sp>
       <p:sp>
         <p:nvSpPr>
-          <p:cNvPr id="13" name="TextBox 12"/>
+          <p:cNvPr id="11" name="TextBox 10"/>
           <p:cNvSpPr txBox="1"/>
           <p:nvPr/>
         </p:nvSpPr>
@@ -7866,41 +7840,7 @@
       </p:sp>
       <p:sp>
         <p:nvSpPr>
-          <p:cNvPr id="14" name="TextBox 13"/>
-          <p:cNvSpPr txBox="1"/>
-          <p:nvPr/>
-        </p:nvSpPr>
-        <p:spPr>
-          <a:xfrm>
-            <a:off x="4026407" y="1005840"/>
-            <a:ext cx="109728" cy="457200"/>
-          </a:xfrm>
-          <a:prstGeom prst="rect">
-            <a:avLst/>
-          </a:prstGeom>
-          <a:noFill/>
-        </p:spPr>
-        <p:txBody>
-          <a:bodyPr wrap="square">
-            <a:spAutoFit/>
-          </a:bodyPr>
-          <a:lstStyle/>
-          <a:p>
-            <a:pPr algn="ctr"/>
-            <a:r>
-              <a:rPr sz="1400" b="1" i="0">
-                <a:solidFill>
-                  <a:srgbClr val="AAAAAA"/>
-                </a:solidFill>
-              </a:rPr>
-              <a:t>›</a:t>
-            </a:r>
-          </a:p>
-        </p:txBody>
-      </p:sp>
-      <p:sp>
-        <p:nvSpPr>
-          <p:cNvPr id="15" name="Rectangle 14"/>
+          <p:cNvPr id="12" name="Rectangle 11"/>
           <p:cNvSpPr/>
           <p:nvPr/>
         </p:nvSpPr>
@@ -7916,7 +7856,9 @@
             <a:srgbClr val="167A3A"/>
           </a:solidFill>
           <a:ln>
-            <a:noFill/>
+            <a:solidFill>
+              <a:srgbClr val="167A3A"/>
+            </a:solidFill>
           </a:ln>
         </p:spPr>
         <p:style>
@@ -7943,7 +7885,7 @@
       </p:sp>
       <p:sp>
         <p:nvSpPr>
-          <p:cNvPr id="16" name="TextBox 15"/>
+          <p:cNvPr id="13" name="TextBox 12"/>
           <p:cNvSpPr txBox="1"/>
           <p:nvPr/>
         </p:nvSpPr>
@@ -7977,7 +7919,7 @@
       </p:sp>
       <p:sp>
         <p:nvSpPr>
-          <p:cNvPr id="17" name="TextBox 16"/>
+          <p:cNvPr id="14" name="TextBox 13"/>
           <p:cNvSpPr txBox="1"/>
           <p:nvPr/>
         </p:nvSpPr>
@@ -8004,7 +7946,7 @@
                   <a:srgbClr val="DDDDDD"/>
                 </a:solidFill>
               </a:rPr>
-              <a:t>Freeze arch →
+              <a:t>Freeze arch,
 push to DVT?</a:t>
             </a:r>
           </a:p>
@@ -8012,41 +7954,7 @@
       </p:sp>
       <p:sp>
         <p:nvSpPr>
-          <p:cNvPr id="18" name="TextBox 17"/>
-          <p:cNvSpPr txBox="1"/>
-          <p:nvPr/>
-        </p:nvSpPr>
-        <p:spPr>
-          <a:xfrm>
-            <a:off x="5380736" y="1005840"/>
-            <a:ext cx="109728" cy="457200"/>
-          </a:xfrm>
-          <a:prstGeom prst="rect">
-            <a:avLst/>
-          </a:prstGeom>
-          <a:noFill/>
-        </p:spPr>
-        <p:txBody>
-          <a:bodyPr wrap="square">
-            <a:spAutoFit/>
-          </a:bodyPr>
-          <a:lstStyle/>
-          <a:p>
-            <a:pPr algn="ctr"/>
-            <a:r>
-              <a:rPr sz="1400" b="1" i="0">
-                <a:solidFill>
-                  <a:srgbClr val="AAAAAA"/>
-                </a:solidFill>
-              </a:rPr>
-              <a:t>›</a:t>
-            </a:r>
-          </a:p>
-        </p:txBody>
-      </p:sp>
-      <p:sp>
-        <p:nvSpPr>
-          <p:cNvPr id="19" name="Rectangle 18"/>
+          <p:cNvPr id="15" name="Rectangle 14"/>
           <p:cNvSpPr/>
           <p:nvPr/>
         </p:nvSpPr>
@@ -8062,7 +7970,9 @@
             <a:srgbClr val="5A7200"/>
           </a:solidFill>
           <a:ln>
-            <a:noFill/>
+            <a:solidFill>
+              <a:srgbClr val="5A7200"/>
+            </a:solidFill>
           </a:ln>
         </p:spPr>
         <p:style>
@@ -8089,7 +7999,7 @@
       </p:sp>
       <p:sp>
         <p:nvSpPr>
-          <p:cNvPr id="20" name="TextBox 19"/>
+          <p:cNvPr id="16" name="TextBox 15"/>
           <p:cNvSpPr txBox="1"/>
           <p:nvPr/>
         </p:nvSpPr>
@@ -8123,7 +8033,7 @@
       </p:sp>
       <p:sp>
         <p:nvSpPr>
-          <p:cNvPr id="21" name="TextBox 20"/>
+          <p:cNvPr id="17" name="TextBox 16"/>
           <p:cNvSpPr txBox="1"/>
           <p:nvPr/>
         </p:nvSpPr>
@@ -8151,48 +8061,14 @@
                 </a:solidFill>
               </a:rPr>
               <a:t>Arch mature?
-Test plan ready?</a:t>
+Test plan set?</a:t>
             </a:r>
           </a:p>
         </p:txBody>
       </p:sp>
       <p:sp>
         <p:nvSpPr>
-          <p:cNvPr id="22" name="TextBox 21"/>
-          <p:cNvSpPr txBox="1"/>
-          <p:nvPr/>
-        </p:nvSpPr>
-        <p:spPr>
-          <a:xfrm>
-            <a:off x="6735064" y="1005840"/>
-            <a:ext cx="109728" cy="457200"/>
-          </a:xfrm>
-          <a:prstGeom prst="rect">
-            <a:avLst/>
-          </a:prstGeom>
-          <a:noFill/>
-        </p:spPr>
-        <p:txBody>
-          <a:bodyPr wrap="square">
-            <a:spAutoFit/>
-          </a:bodyPr>
-          <a:lstStyle/>
-          <a:p>
-            <a:pPr algn="ctr"/>
-            <a:r>
-              <a:rPr sz="1400" b="1" i="0">
-                <a:solidFill>
-                  <a:srgbClr val="AAAAAA"/>
-                </a:solidFill>
-              </a:rPr>
-              <a:t>›</a:t>
-            </a:r>
-          </a:p>
-        </p:txBody>
-      </p:sp>
-      <p:sp>
-        <p:nvSpPr>
-          <p:cNvPr id="23" name="Rectangle 22"/>
+          <p:cNvPr id="18" name="Rectangle 17"/>
           <p:cNvSpPr/>
           <p:nvPr/>
         </p:nvSpPr>
@@ -8208,7 +8084,9 @@
             <a:srgbClr val="7A5000"/>
           </a:solidFill>
           <a:ln>
-            <a:noFill/>
+            <a:solidFill>
+              <a:srgbClr val="7A5000"/>
+            </a:solidFill>
           </a:ln>
         </p:spPr>
         <p:style>
@@ -8235,7 +8113,7 @@
       </p:sp>
       <p:sp>
         <p:nvSpPr>
-          <p:cNvPr id="24" name="TextBox 23"/>
+          <p:cNvPr id="19" name="TextBox 18"/>
           <p:cNvSpPr txBox="1"/>
           <p:nvPr/>
         </p:nvSpPr>
@@ -8269,7 +8147,7 @@
       </p:sp>
       <p:sp>
         <p:nvSpPr>
-          <p:cNvPr id="25" name="TextBox 24"/>
+          <p:cNvPr id="20" name="TextBox 19"/>
           <p:cNvSpPr txBox="1"/>
           <p:nvPr/>
         </p:nvSpPr>
@@ -8297,48 +8175,14 @@
                 </a:solidFill>
               </a:rPr>
               <a:t>Pass validation
-&amp; certification?</a:t>
+&amp; certs?</a:t>
             </a:r>
           </a:p>
         </p:txBody>
       </p:sp>
       <p:sp>
         <p:nvSpPr>
-          <p:cNvPr id="26" name="TextBox 25"/>
-          <p:cNvSpPr txBox="1"/>
-          <p:nvPr/>
-        </p:nvSpPr>
-        <p:spPr>
-          <a:xfrm>
-            <a:off x="8089391" y="1005840"/>
-            <a:ext cx="109728" cy="457200"/>
-          </a:xfrm>
-          <a:prstGeom prst="rect">
-            <a:avLst/>
-          </a:prstGeom>
-          <a:noFill/>
-        </p:spPr>
-        <p:txBody>
-          <a:bodyPr wrap="square">
-            <a:spAutoFit/>
-          </a:bodyPr>
-          <a:lstStyle/>
-          <a:p>
-            <a:pPr algn="ctr"/>
-            <a:r>
-              <a:rPr sz="1400" b="1" i="0">
-                <a:solidFill>
-                  <a:srgbClr val="AAAAAA"/>
-                </a:solidFill>
-              </a:rPr>
-              <a:t>›</a:t>
-            </a:r>
-          </a:p>
-        </p:txBody>
-      </p:sp>
-      <p:sp>
-        <p:nvSpPr>
-          <p:cNvPr id="27" name="Rectangle 26"/>
+          <p:cNvPr id="21" name="Rectangle 20"/>
           <p:cNvSpPr/>
           <p:nvPr/>
         </p:nvSpPr>
@@ -8354,7 +8198,9 @@
             <a:srgbClr val="8B2500"/>
           </a:solidFill>
           <a:ln>
-            <a:noFill/>
+            <a:solidFill>
+              <a:srgbClr val="8B2500"/>
+            </a:solidFill>
           </a:ln>
         </p:spPr>
         <p:style>
@@ -8381,7 +8227,7 @@
       </p:sp>
       <p:sp>
         <p:nvSpPr>
-          <p:cNvPr id="28" name="TextBox 27"/>
+          <p:cNvPr id="22" name="TextBox 21"/>
           <p:cNvSpPr txBox="1"/>
           <p:nvPr/>
         </p:nvSpPr>
@@ -8415,7 +8261,7 @@
       </p:sp>
       <p:sp>
         <p:nvSpPr>
-          <p:cNvPr id="29" name="TextBox 28"/>
+          <p:cNvPr id="23" name="TextBox 22"/>
           <p:cNvSpPr txBox="1"/>
           <p:nvPr/>
         </p:nvSpPr>
@@ -8450,41 +8296,7 @@
       </p:sp>
       <p:sp>
         <p:nvSpPr>
-          <p:cNvPr id="30" name="TextBox 29"/>
-          <p:cNvSpPr txBox="1"/>
-          <p:nvPr/>
-        </p:nvSpPr>
-        <p:spPr>
-          <a:xfrm>
-            <a:off x="9443720" y="1005840"/>
-            <a:ext cx="109728" cy="457200"/>
-          </a:xfrm>
-          <a:prstGeom prst="rect">
-            <a:avLst/>
-          </a:prstGeom>
-          <a:noFill/>
-        </p:spPr>
-        <p:txBody>
-          <a:bodyPr wrap="square">
-            <a:spAutoFit/>
-          </a:bodyPr>
-          <a:lstStyle/>
-          <a:p>
-            <a:pPr algn="ctr"/>
-            <a:r>
-              <a:rPr sz="1400" b="1" i="0">
-                <a:solidFill>
-                  <a:srgbClr val="AAAAAA"/>
-                </a:solidFill>
-              </a:rPr>
-              <a:t>›</a:t>
-            </a:r>
-          </a:p>
-        </p:txBody>
-      </p:sp>
-      <p:sp>
-        <p:nvSpPr>
-          <p:cNvPr id="31" name="Rectangle 30"/>
+          <p:cNvPr id="24" name="Rectangle 23"/>
           <p:cNvSpPr/>
           <p:nvPr/>
         </p:nvSpPr>
@@ -8500,7 +8312,9 @@
             <a:srgbClr val="8B001A"/>
           </a:solidFill>
           <a:ln>
-            <a:noFill/>
+            <a:solidFill>
+              <a:srgbClr val="8B001A"/>
+            </a:solidFill>
           </a:ln>
         </p:spPr>
         <p:style>
@@ -8527,7 +8341,7 @@
       </p:sp>
       <p:sp>
         <p:nvSpPr>
-          <p:cNvPr id="32" name="TextBox 31"/>
+          <p:cNvPr id="25" name="TextBox 24"/>
           <p:cNvSpPr txBox="1"/>
           <p:nvPr/>
         </p:nvSpPr>
@@ -8561,7 +8375,7 @@
       </p:sp>
       <p:sp>
         <p:nvSpPr>
-          <p:cNvPr id="33" name="TextBox 32"/>
+          <p:cNvPr id="26" name="TextBox 25"/>
           <p:cNvSpPr txBox="1"/>
           <p:nvPr/>
         </p:nvSpPr>
@@ -8596,41 +8410,7 @@
       </p:sp>
       <p:sp>
         <p:nvSpPr>
-          <p:cNvPr id="34" name="TextBox 33"/>
-          <p:cNvSpPr txBox="1"/>
-          <p:nvPr/>
-        </p:nvSpPr>
-        <p:spPr>
-          <a:xfrm>
-            <a:off x="10798047" y="1005840"/>
-            <a:ext cx="109728" cy="457200"/>
-          </a:xfrm>
-          <a:prstGeom prst="rect">
-            <a:avLst/>
-          </a:prstGeom>
-          <a:noFill/>
-        </p:spPr>
-        <p:txBody>
-          <a:bodyPr wrap="square">
-            <a:spAutoFit/>
-          </a:bodyPr>
-          <a:lstStyle/>
-          <a:p>
-            <a:pPr algn="ctr"/>
-            <a:r>
-              <a:rPr sz="1400" b="1" i="0">
-                <a:solidFill>
-                  <a:srgbClr val="AAAAAA"/>
-                </a:solidFill>
-              </a:rPr>
-              <a:t>›</a:t>
-            </a:r>
-          </a:p>
-        </p:txBody>
-      </p:sp>
-      <p:sp>
-        <p:nvSpPr>
-          <p:cNvPr id="35" name="Rectangle 34"/>
+          <p:cNvPr id="27" name="Rectangle 26"/>
           <p:cNvSpPr/>
           <p:nvPr/>
         </p:nvSpPr>
@@ -8646,7 +8426,9 @@
             <a:srgbClr val="4A004A"/>
           </a:solidFill>
           <a:ln>
-            <a:noFill/>
+            <a:solidFill>
+              <a:srgbClr val="4A004A"/>
+            </a:solidFill>
           </a:ln>
         </p:spPr>
         <p:style>
@@ -8673,7 +8455,7 @@
       </p:sp>
       <p:sp>
         <p:nvSpPr>
-          <p:cNvPr id="36" name="TextBox 35"/>
+          <p:cNvPr id="28" name="TextBox 27"/>
           <p:cNvSpPr txBox="1"/>
           <p:nvPr/>
         </p:nvSpPr>
@@ -8707,7 +8489,7 @@
       </p:sp>
       <p:sp>
         <p:nvSpPr>
-          <p:cNvPr id="37" name="TextBox 36"/>
+          <p:cNvPr id="29" name="TextBox 28"/>
           <p:cNvSpPr txBox="1"/>
           <p:nvPr/>
         </p:nvSpPr>
@@ -8742,7 +8524,7 @@
       </p:sp>
       <p:sp>
         <p:nvSpPr>
-          <p:cNvPr id="38" name="TextBox 37"/>
+          <p:cNvPr id="30" name="TextBox 29"/>
           <p:cNvSpPr txBox="1"/>
           <p:nvPr/>
         </p:nvSpPr>
@@ -8769,14 +8551,14 @@
                   <a:srgbClr val="AAAAAA"/>
                 </a:solidFill>
               </a:rPr>
-              <a:t>★  Gate reviews (Go / No-Go / Hold / Pivot) required at the end of each major phase</a:t>
+              <a:t>Gate reviews (Go / No-Go / Hold / Pivot) required at the end of each major phase</a:t>
             </a:r>
           </a:p>
         </p:txBody>
       </p:sp>
       <p:sp>
         <p:nvSpPr>
-          <p:cNvPr id="39" name="TextBox 38"/>
+          <p:cNvPr id="31" name="TextBox 30"/>
           <p:cNvSpPr txBox="1"/>
           <p:nvPr/>
         </p:nvSpPr>
@@ -8803,14 +8585,14 @@
                   <a:srgbClr val="AAAAAA"/>
                 </a:solidFill>
               </a:rPr>
-              <a:t>Roles:  SVP  ·  Eng Directors  ·  Project Management  ·  Mechanical Eng  ·  Electrical Eng  ·  Firmware Eng  ·  ID/UX  ·  Product Development  ·  Quality/Manufacturing  ·  Operations</a:t>
+              <a:t>Roles:  SVP  |  Eng Directors  |  Project Management  |  Mechanical Eng  |  Electrical Eng  |  Firmware Eng  |  ID/UX  |  Product Development  |  Quality/Manufacturing  |  Operations</a:t>
             </a:r>
           </a:p>
         </p:txBody>
       </p:sp>
       <p:sp>
         <p:nvSpPr>
-          <p:cNvPr id="40" name="Rectangle 39"/>
+          <p:cNvPr id="32" name="Rectangle 31"/>
           <p:cNvSpPr/>
           <p:nvPr/>
         </p:nvSpPr>
@@ -8826,7 +8608,9 @@
             <a:srgbClr val="BF1F1F"/>
           </a:solidFill>
           <a:ln>
-            <a:noFill/>
+            <a:solidFill>
+              <a:srgbClr val="BF1F1F"/>
+            </a:solidFill>
           </a:ln>
         </p:spPr>
         <p:style>
@@ -8853,7 +8637,7 @@
       </p:sp>
       <p:sp>
         <p:nvSpPr>
-          <p:cNvPr id="41" name="TextBox 40"/>
+          <p:cNvPr id="33" name="TextBox 32"/>
           <p:cNvSpPr txBox="1"/>
           <p:nvPr/>
         </p:nvSpPr>
@@ -8887,7 +8671,7 @@
       </p:sp>
       <p:sp>
         <p:nvSpPr>
-          <p:cNvPr id="42" name="Rectangle 41"/>
+          <p:cNvPr id="34" name="Rectangle 33"/>
           <p:cNvSpPr/>
           <p:nvPr/>
         </p:nvSpPr>
@@ -8903,7 +8687,9 @@
             <a:srgbClr val="E07C00"/>
           </a:solidFill>
           <a:ln>
-            <a:noFill/>
+            <a:solidFill>
+              <a:srgbClr val="E07C00"/>
+            </a:solidFill>
           </a:ln>
         </p:spPr>
         <p:style>
@@ -8930,7 +8716,7 @@
       </p:sp>
       <p:sp>
         <p:nvSpPr>
-          <p:cNvPr id="43" name="TextBox 42"/>
+          <p:cNvPr id="35" name="TextBox 34"/>
           <p:cNvSpPr txBox="1"/>
           <p:nvPr/>
         </p:nvSpPr>
@@ -8964,7 +8750,7 @@
       </p:sp>
       <p:sp>
         <p:nvSpPr>
-          <p:cNvPr id="44" name="Rectangle 43"/>
+          <p:cNvPr id="36" name="Rectangle 35"/>
           <p:cNvSpPr/>
           <p:nvPr/>
         </p:nvSpPr>
@@ -8980,7 +8766,9 @@
             <a:srgbClr val="1A65AD"/>
           </a:solidFill>
           <a:ln>
-            <a:noFill/>
+            <a:solidFill>
+              <a:srgbClr val="1A65AD"/>
+            </a:solidFill>
           </a:ln>
         </p:spPr>
         <p:style>
@@ -9007,7 +8795,7 @@
       </p:sp>
       <p:sp>
         <p:nvSpPr>
-          <p:cNvPr id="45" name="TextBox 44"/>
+          <p:cNvPr id="37" name="TextBox 36"/>
           <p:cNvSpPr txBox="1"/>
           <p:nvPr/>
         </p:nvSpPr>
@@ -9041,7 +8829,7 @@
       </p:sp>
       <p:sp>
         <p:nvSpPr>
-          <p:cNvPr id="46" name="Rectangle 45"/>
+          <p:cNvPr id="38" name="Rectangle 37"/>
           <p:cNvSpPr/>
           <p:nvPr/>
         </p:nvSpPr>
@@ -9057,7 +8845,9 @@
             <a:srgbClr val="888888"/>
           </a:solidFill>
           <a:ln>
-            <a:noFill/>
+            <a:solidFill>
+              <a:srgbClr val="888888"/>
+            </a:solidFill>
           </a:ln>
         </p:spPr>
         <p:style>
@@ -9084,7 +8874,7 @@
       </p:sp>
       <p:sp>
         <p:nvSpPr>
-          <p:cNvPr id="47" name="TextBox 46"/>
+          <p:cNvPr id="39" name="TextBox 38"/>
           <p:cNvSpPr txBox="1"/>
           <p:nvPr/>
         </p:nvSpPr>
@@ -9118,7 +8908,7 @@
       </p:sp>
       <p:sp>
         <p:nvSpPr>
-          <p:cNvPr id="48" name="Rectangle 47"/>
+          <p:cNvPr id="40" name="Rectangle 39"/>
           <p:cNvSpPr/>
           <p:nvPr/>
         </p:nvSpPr>
@@ -9134,7 +8924,9 @@
             <a:srgbClr val="7A187A"/>
           </a:solidFill>
           <a:ln>
-            <a:noFill/>
+            <a:solidFill>
+              <a:srgbClr val="7A187A"/>
+            </a:solidFill>
           </a:ln>
         </p:spPr>
         <p:style>
@@ -9161,7 +8953,7 @@
       </p:sp>
       <p:sp>
         <p:nvSpPr>
-          <p:cNvPr id="49" name="TextBox 48"/>
+          <p:cNvPr id="41" name="TextBox 40"/>
           <p:cNvSpPr txBox="1"/>
           <p:nvPr/>
         </p:nvSpPr>
@@ -9237,7 +9029,9 @@
             <a:srgbClr val="1B457A"/>
           </a:solidFill>
           <a:ln>
-            <a:noFill/>
+            <a:solidFill>
+              <a:srgbClr val="1B457A"/>
+            </a:solidFill>
           </a:ln>
         </p:spPr>
         <p:style>
@@ -9348,7 +9142,9 @@
             <a:srgbClr val="BF1F1F"/>
           </a:solidFill>
           <a:ln>
-            <a:noFill/>
+            <a:solidFill>
+              <a:srgbClr val="BF1F1F"/>
+            </a:solidFill>
           </a:ln>
         </p:spPr>
         <p:style>
@@ -9425,7 +9221,9 @@
             <a:srgbClr val="E07C00"/>
           </a:solidFill>
           <a:ln>
-            <a:noFill/>
+            <a:solidFill>
+              <a:srgbClr val="E07C00"/>
+            </a:solidFill>
           </a:ln>
         </p:spPr>
         <p:style>
@@ -9502,7 +9300,9 @@
             <a:srgbClr val="1A65AD"/>
           </a:solidFill>
           <a:ln>
-            <a:noFill/>
+            <a:solidFill>
+              <a:srgbClr val="1A65AD"/>
+            </a:solidFill>
           </a:ln>
         </p:spPr>
         <p:style>
@@ -9579,7 +9379,9 @@
             <a:srgbClr val="888888"/>
           </a:solidFill>
           <a:ln>
-            <a:noFill/>
+            <a:solidFill>
+              <a:srgbClr val="888888"/>
+            </a:solidFill>
           </a:ln>
         </p:spPr>
         <p:style>
@@ -9656,7 +9458,9 @@
             <a:srgbClr val="7A187A"/>
           </a:solidFill>
           <a:ln>
-            <a:noFill/>
+            <a:solidFill>
+              <a:srgbClr val="7A187A"/>
+            </a:solidFill>
           </a:ln>
         </p:spPr>
         <p:style>
@@ -12687,7 +12491,7 @@
                             <a:srgbClr val="FFFFFF"/>
                           </a:solidFill>
                         </a:rPr>
-                        <a:t>★  Discovery Exit Gate Review</a:t>
+                        <a:t>GATE: Discovery Exit Review</a:t>
                       </a:r>
                     </a:p>
                   </a:txBody>
@@ -12966,7 +12770,9 @@
             <a:srgbClr val="0D628A"/>
           </a:solidFill>
           <a:ln>
-            <a:noFill/>
+            <a:solidFill>
+              <a:srgbClr val="0D628A"/>
+            </a:solidFill>
           </a:ln>
         </p:spPr>
         <p:style>
@@ -13077,7 +12883,9 @@
             <a:srgbClr val="BF1F1F"/>
           </a:solidFill>
           <a:ln>
-            <a:noFill/>
+            <a:solidFill>
+              <a:srgbClr val="BF1F1F"/>
+            </a:solidFill>
           </a:ln>
         </p:spPr>
         <p:style>
@@ -13154,7 +12962,9 @@
             <a:srgbClr val="E07C00"/>
           </a:solidFill>
           <a:ln>
-            <a:noFill/>
+            <a:solidFill>
+              <a:srgbClr val="E07C00"/>
+            </a:solidFill>
           </a:ln>
         </p:spPr>
         <p:style>
@@ -13231,7 +13041,9 @@
             <a:srgbClr val="1A65AD"/>
           </a:solidFill>
           <a:ln>
-            <a:noFill/>
+            <a:solidFill>
+              <a:srgbClr val="1A65AD"/>
+            </a:solidFill>
           </a:ln>
         </p:spPr>
         <p:style>
@@ -13308,7 +13120,9 @@
             <a:srgbClr val="888888"/>
           </a:solidFill>
           <a:ln>
-            <a:noFill/>
+            <a:solidFill>
+              <a:srgbClr val="888888"/>
+            </a:solidFill>
           </a:ln>
         </p:spPr>
         <p:style>
@@ -13385,7 +13199,9 @@
             <a:srgbClr val="7A187A"/>
           </a:solidFill>
           <a:ln>
-            <a:noFill/>
+            <a:solidFill>
+              <a:srgbClr val="7A187A"/>
+            </a:solidFill>
           </a:ln>
         </p:spPr>
         <p:style>
@@ -16172,7 +15988,7 @@
                             <a:srgbClr val="FFFFFF"/>
                           </a:solidFill>
                         </a:rPr>
-                        <a:t>★  Concept Exit Gate Review</a:t>
+                        <a:t>GATE: Concept Exit Review</a:t>
                       </a:r>
                     </a:p>
                   </a:txBody>
@@ -16451,7 +16267,9 @@
             <a:srgbClr val="0A7465"/>
           </a:solidFill>
           <a:ln>
-            <a:noFill/>
+            <a:solidFill>
+              <a:srgbClr val="0A7465"/>
+            </a:solidFill>
           </a:ln>
         </p:spPr>
         <p:style>
@@ -16562,7 +16380,9 @@
             <a:srgbClr val="BF1F1F"/>
           </a:solidFill>
           <a:ln>
-            <a:noFill/>
+            <a:solidFill>
+              <a:srgbClr val="BF1F1F"/>
+            </a:solidFill>
           </a:ln>
         </p:spPr>
         <p:style>
@@ -16639,7 +16459,9 @@
             <a:srgbClr val="E07C00"/>
           </a:solidFill>
           <a:ln>
-            <a:noFill/>
+            <a:solidFill>
+              <a:srgbClr val="E07C00"/>
+            </a:solidFill>
           </a:ln>
         </p:spPr>
         <p:style>
@@ -16716,7 +16538,9 @@
             <a:srgbClr val="1A65AD"/>
           </a:solidFill>
           <a:ln>
-            <a:noFill/>
+            <a:solidFill>
+              <a:srgbClr val="1A65AD"/>
+            </a:solidFill>
           </a:ln>
         </p:spPr>
         <p:style>
@@ -16793,7 +16617,9 @@
             <a:srgbClr val="888888"/>
           </a:solidFill>
           <a:ln>
-            <a:noFill/>
+            <a:solidFill>
+              <a:srgbClr val="888888"/>
+            </a:solidFill>
           </a:ln>
         </p:spPr>
         <p:style>
@@ -16870,7 +16696,9 @@
             <a:srgbClr val="7A187A"/>
           </a:solidFill>
           <a:ln>
-            <a:noFill/>
+            <a:solidFill>
+              <a:srgbClr val="7A187A"/>
+            </a:solidFill>
           </a:ln>
         </p:spPr>
         <p:style>
@@ -18716,7 +18544,9 @@
             <a:srgbClr val="167A3A"/>
           </a:solidFill>
           <a:ln>
-            <a:noFill/>
+            <a:solidFill>
+              <a:srgbClr val="167A3A"/>
+            </a:solidFill>
           </a:ln>
         </p:spPr>
         <p:style>
@@ -18827,7 +18657,9 @@
             <a:srgbClr val="BF1F1F"/>
           </a:solidFill>
           <a:ln>
-            <a:noFill/>
+            <a:solidFill>
+              <a:srgbClr val="BF1F1F"/>
+            </a:solidFill>
           </a:ln>
         </p:spPr>
         <p:style>
@@ -18904,7 +18736,9 @@
             <a:srgbClr val="E07C00"/>
           </a:solidFill>
           <a:ln>
-            <a:noFill/>
+            <a:solidFill>
+              <a:srgbClr val="E07C00"/>
+            </a:solidFill>
           </a:ln>
         </p:spPr>
         <p:style>
@@ -18981,7 +18815,9 @@
             <a:srgbClr val="1A65AD"/>
           </a:solidFill>
           <a:ln>
-            <a:noFill/>
+            <a:solidFill>
+              <a:srgbClr val="1A65AD"/>
+            </a:solidFill>
           </a:ln>
         </p:spPr>
         <p:style>
@@ -19058,7 +18894,9 @@
             <a:srgbClr val="888888"/>
           </a:solidFill>
           <a:ln>
-            <a:noFill/>
+            <a:solidFill>
+              <a:srgbClr val="888888"/>
+            </a:solidFill>
           </a:ln>
         </p:spPr>
         <p:style>
@@ -19135,7 +18973,9 @@
             <a:srgbClr val="7A187A"/>
           </a:solidFill>
           <a:ln>
-            <a:noFill/>
+            <a:solidFill>
+              <a:srgbClr val="7A187A"/>
+            </a:solidFill>
           </a:ln>
         </p:spPr>
         <p:style>
@@ -22166,7 +22006,7 @@
                             <a:srgbClr val="FFFFFF"/>
                           </a:solidFill>
                         </a:rPr>
-                        <a:t>★  EVT Exit Gate Review</a:t>
+                        <a:t>GATE: EVT Exit Review</a:t>
                       </a:r>
                     </a:p>
                   </a:txBody>
@@ -22445,7 +22285,9 @@
             <a:srgbClr val="5A7200"/>
           </a:solidFill>
           <a:ln>
-            <a:noFill/>
+            <a:solidFill>
+              <a:srgbClr val="5A7200"/>
+            </a:solidFill>
           </a:ln>
         </p:spPr>
         <p:style>
@@ -22556,7 +22398,9 @@
             <a:srgbClr val="BF1F1F"/>
           </a:solidFill>
           <a:ln>
-            <a:noFill/>
+            <a:solidFill>
+              <a:srgbClr val="BF1F1F"/>
+            </a:solidFill>
           </a:ln>
         </p:spPr>
         <p:style>
@@ -22633,7 +22477,9 @@
             <a:srgbClr val="E07C00"/>
           </a:solidFill>
           <a:ln>
-            <a:noFill/>
+            <a:solidFill>
+              <a:srgbClr val="E07C00"/>
+            </a:solidFill>
           </a:ln>
         </p:spPr>
         <p:style>
@@ -22710,7 +22556,9 @@
             <a:srgbClr val="1A65AD"/>
           </a:solidFill>
           <a:ln>
-            <a:noFill/>
+            <a:solidFill>
+              <a:srgbClr val="1A65AD"/>
+            </a:solidFill>
           </a:ln>
         </p:spPr>
         <p:style>
@@ -22787,7 +22635,9 @@
             <a:srgbClr val="888888"/>
           </a:solidFill>
           <a:ln>
-            <a:noFill/>
+            <a:solidFill>
+              <a:srgbClr val="888888"/>
+            </a:solidFill>
           </a:ln>
         </p:spPr>
         <p:style>
@@ -22864,7 +22714,9 @@
             <a:srgbClr val="7A187A"/>
           </a:solidFill>
           <a:ln>
-            <a:noFill/>
+            <a:solidFill>
+              <a:srgbClr val="7A187A"/>
+            </a:solidFill>
           </a:ln>
         </p:spPr>
         <p:style>
@@ -23211,7 +23063,7 @@
                             <a:srgbClr val="333333"/>
                           </a:solidFill>
                         </a:rPr>
-                        <a:t>Design Status – Frozen</a:t>
+                        <a:t>Design Status - Frozen</a:t>
                       </a:r>
                     </a:p>
                   </a:txBody>
@@ -24954,7 +24806,9 @@
             <a:srgbClr val="7A5000"/>
           </a:solidFill>
           <a:ln>
-            <a:noFill/>
+            <a:solidFill>
+              <a:srgbClr val="7A5000"/>
+            </a:solidFill>
           </a:ln>
         </p:spPr>
         <p:style>
@@ -25065,7 +24919,9 @@
             <a:srgbClr val="BF1F1F"/>
           </a:solidFill>
           <a:ln>
-            <a:noFill/>
+            <a:solidFill>
+              <a:srgbClr val="BF1F1F"/>
+            </a:solidFill>
           </a:ln>
         </p:spPr>
         <p:style>
@@ -25142,7 +24998,9 @@
             <a:srgbClr val="E07C00"/>
           </a:solidFill>
           <a:ln>
-            <a:noFill/>
+            <a:solidFill>
+              <a:srgbClr val="E07C00"/>
+            </a:solidFill>
           </a:ln>
         </p:spPr>
         <p:style>
@@ -25219,7 +25077,9 @@
             <a:srgbClr val="1A65AD"/>
           </a:solidFill>
           <a:ln>
-            <a:noFill/>
+            <a:solidFill>
+              <a:srgbClr val="1A65AD"/>
+            </a:solidFill>
           </a:ln>
         </p:spPr>
         <p:style>
@@ -25296,7 +25156,9 @@
             <a:srgbClr val="888888"/>
           </a:solidFill>
           <a:ln>
-            <a:noFill/>
+            <a:solidFill>
+              <a:srgbClr val="888888"/>
+            </a:solidFill>
           </a:ln>
         </p:spPr>
         <p:style>
@@ -25373,7 +25235,9 @@
             <a:srgbClr val="7A187A"/>
           </a:solidFill>
           <a:ln>
-            <a:noFill/>
+            <a:solidFill>
+              <a:srgbClr val="7A187A"/>
+            </a:solidFill>
           </a:ln>
         </p:spPr>
         <p:style>
@@ -28892,7 +28756,7 @@
                             <a:srgbClr val="FFFFFF"/>
                           </a:solidFill>
                         </a:rPr>
-                        <a:t>★  DVT Exit Gate Review</a:t>
+                        <a:t>GATE: DVT Exit Review</a:t>
                       </a:r>
                     </a:p>
                   </a:txBody>
@@ -29171,7 +29035,9 @@
             <a:srgbClr val="8B2500"/>
           </a:solidFill>
           <a:ln>
-            <a:noFill/>
+            <a:solidFill>
+              <a:srgbClr val="8B2500"/>
+            </a:solidFill>
           </a:ln>
         </p:spPr>
         <p:style>
@@ -29282,7 +29148,9 @@
             <a:srgbClr val="BF1F1F"/>
           </a:solidFill>
           <a:ln>
-            <a:noFill/>
+            <a:solidFill>
+              <a:srgbClr val="BF1F1F"/>
+            </a:solidFill>
           </a:ln>
         </p:spPr>
         <p:style>
@@ -29359,7 +29227,9 @@
             <a:srgbClr val="E07C00"/>
           </a:solidFill>
           <a:ln>
-            <a:noFill/>
+            <a:solidFill>
+              <a:srgbClr val="E07C00"/>
+            </a:solidFill>
           </a:ln>
         </p:spPr>
         <p:style>
@@ -29436,7 +29306,9 @@
             <a:srgbClr val="1A65AD"/>
           </a:solidFill>
           <a:ln>
-            <a:noFill/>
+            <a:solidFill>
+              <a:srgbClr val="1A65AD"/>
+            </a:solidFill>
           </a:ln>
         </p:spPr>
         <p:style>
@@ -29513,7 +29385,9 @@
             <a:srgbClr val="888888"/>
           </a:solidFill>
           <a:ln>
-            <a:noFill/>
+            <a:solidFill>
+              <a:srgbClr val="888888"/>
+            </a:solidFill>
           </a:ln>
         </p:spPr>
         <p:style>
@@ -29590,7 +29464,9 @@
             <a:srgbClr val="7A187A"/>
           </a:solidFill>
           <a:ln>
-            <a:noFill/>
+            <a:solidFill>
+              <a:srgbClr val="7A187A"/>
+            </a:solidFill>
           </a:ln>
         </p:spPr>
         <p:style>
@@ -31645,7 +31521,7 @@
                             <a:srgbClr val="FFFFFF"/>
                           </a:solidFill>
                         </a:rPr>
-                        <a:t>★  PVT Handover Gate Review</a:t>
+                        <a:t>GATE: PVT Handover Review</a:t>
                       </a:r>
                     </a:p>
                   </a:txBody>
